--- a/reports/maharashtra-sir-2026-deck.pptx
+++ b/reports/maharashtra-sir-2026-deck.pptx
@@ -12,9 +12,11 @@
     <p:sldId id="260" r:id="rId6"/>
     <p:sldId id="261" r:id="rId7"/>
     <p:sldId id="262" r:id="rId8"/>
+    <p:sldId id="263" r:id="rId9"/>
+    <p:sldId id="264" r:id="rId10"/>
   </p:sldIdLst>
   <p:notesMasterIdLst>
-    <p:notesMasterId r:id="rId9"/>
+    <p:notesMasterId r:id="rId11"/>
   </p:notesMasterIdLst>
   <p:sldSz cx="12192000" cy="6858000"/>
   <p:notesSz cx="6858000" cy="12192000"/>
@@ -772,7 +774,7 @@
           <a:p>
             <a:r>
               <a:rPr lang="en-US" dirty="0"/>
-              <a:t>According to the press, 74.7% of the names left off were entered as shifted, absent or other, 16.8% as dead and 8.5% as enrolled at more than one place. The three press figures add up to 2,06,99,000, which is 10,513 more than the CEO's total, because each was rounded. They are for the state as a whole, and no count by reason has been published for any district. The Indian Express carried them.</a:t>
+              <a:t>37.1% of the names left off were entered as shifted for good and 36.5% as untraceable or absent, 73.6% together. 16.8% were entered as dead, 8.5% as enrolled at another place and 1.1% under another reason. The five add up to the 2.07 crore left off exactly. A reason is what the officer wrote down, and nobody checked it.</a:t>
             </a:r>
             <a:endParaRPr lang="en-US" dirty="0"/>
           </a:p>
@@ -1036,7 +1038,7 @@
           <a:p>
             <a:r>
               <a:rPr lang="en-US" dirty="0"/>
-              <a:t/>
+              <a:t>1.22 crore electors still on the draft roll were in line for a notice, 15.8 of every 100. 59.8 lakh could not be linked to the last intensive revision and 62.5 lakh had an anomaly in their entry. Mumbai Suburban had the most for its size, 31.7 of every 100 on its draft, and Parbhani the fewest, 1.6. Districts that left off more names also sent more notices (rank correlation 0.75). How many names have been struck off after a hearing has not been published. The counts are from the CEO's release of 4 September 2026.</a:t>
             </a:r>
             <a:endParaRPr lang="en-US" dirty="0"/>
           </a:p>
@@ -1060,6 +1062,182 @@
             <a:fld id="{F7021451-1387-4CA6-816F-3879F97B5CBC}" type="slidenum">
               <a:rPr lang="en-US"/>
               <a:t>7</a:t>
+            </a:fld>
+            <a:endParaRPr lang="en-US"/>
+          </a:p>
+        </p:txBody>
+      </p:sp>
+    </p:spTree>
+    <p:extLst>
+      <p:ext uri="{BB962C8B-B14F-4D97-AF65-F5344CB8AC3E}">
+        <p14:creationId xmlns:p14="http://schemas.microsoft.com/office/powerpoint/2010/main" val="1024086991"/>
+      </p:ext>
+    </p:extLst>
+  </p:cSld>
+  <p:clrMapOvr>
+    <a:masterClrMapping/>
+  </p:clrMapOvr>
+</p:notes>
+</file>
+
+<file path=ppt/notesSlides/notesSlide8.xml><?xml version="1.0" encoding="utf-8"?>
+<p:notes xmlns:a="http://schemas.openxmlformats.org/drawingml/2006/main" xmlns:r="http://schemas.openxmlformats.org/officeDocument/2006/relationships" xmlns:p="http://schemas.openxmlformats.org/presentationml/2006/main">
+  <p:cSld>
+    <p:spTree>
+      <p:nvGrpSpPr>
+        <p:cNvPr id="1" name=""/>
+        <p:cNvGrpSpPr/>
+        <p:nvPr/>
+      </p:nvGrpSpPr>
+      <p:grpSpPr>
+        <a:xfrm>
+          <a:off x="0" y="0"/>
+          <a:ext cx="0" cy="0"/>
+          <a:chOff x="0" y="0"/>
+          <a:chExt cx="0" cy="0"/>
+        </a:xfrm>
+      </p:grpSpPr>
+      <p:sp>
+        <p:nvSpPr>
+          <p:cNvPr id="2" name="Slide Image Placeholder 1"/>
+          <p:cNvSpPr>
+            <a:spLocks noGrp="1" noRot="1" noChangeAspect="1"/>
+          </p:cNvSpPr>
+          <p:nvPr>
+            <p:ph type="sldImg"/>
+          </p:nvPr>
+        </p:nvSpPr>
+        <p:spPr/>
+      </p:sp>
+      <p:sp>
+        <p:nvSpPr>
+          <p:cNvPr id="3" name="Notes Placeholder 2"/>
+          <p:cNvSpPr>
+            <a:spLocks noGrp="1"/>
+          </p:cNvSpPr>
+          <p:nvPr>
+            <p:ph type="body" idx="1"/>
+          </p:nvPr>
+        </p:nvSpPr>
+        <p:spPr/>
+        <p:txBody>
+          <a:bodyPr/>
+          <a:lstStyle/>
+          <a:p>
+            <a:r>
+              <a:rPr lang="en-US" dirty="0"/>
+              <a:t>In 220 of the 288 constituencies more names were left off the draft than the 2024 winner's margin. Not everyone on a roll votes, so scaled down by each seat's 2024 turnout it is 183. By the party that won the seat in 2024, the names left off per 100 were 22.9 in the BJP's 132, 20.8 in the Shiv Sena's 57, 16.0 in the NCP's 41, 22.5 in the Shiv Sena (UBT)'s 20, 21.8 in the Congress's 16 and 20.5 in the NCP (SP)'s 10. Set against each seat's own district, the six parties run from -3.5 to 0.8 points, so most of the difference comes from where each party's seats are. Red dots are constituencies in the five city districts.</a:t>
+            </a:r>
+            <a:endParaRPr lang="en-US" dirty="0"/>
+          </a:p>
+        </p:txBody>
+      </p:sp>
+      <p:sp>
+        <p:nvSpPr>
+          <p:cNvPr id="4" name="Slide Number Placeholder 3"/>
+          <p:cNvSpPr>
+            <a:spLocks noGrp="1"/>
+          </p:cNvSpPr>
+          <p:nvPr>
+            <p:ph type="sldNum" sz="quarter" idx="10"/>
+          </p:nvPr>
+        </p:nvSpPr>
+        <p:spPr/>
+        <p:txBody>
+          <a:bodyPr/>
+          <a:lstStyle/>
+          <a:p>
+            <a:fld id="{F7021451-1387-4CA6-816F-3879F97B5CBC}" type="slidenum">
+              <a:rPr lang="en-US"/>
+              <a:t>8</a:t>
+            </a:fld>
+            <a:endParaRPr lang="en-US"/>
+          </a:p>
+        </p:txBody>
+      </p:sp>
+    </p:spTree>
+    <p:extLst>
+      <p:ext uri="{BB962C8B-B14F-4D97-AF65-F5344CB8AC3E}">
+        <p14:creationId xmlns:p14="http://schemas.microsoft.com/office/powerpoint/2010/main" val="1024086991"/>
+      </p:ext>
+    </p:extLst>
+  </p:cSld>
+  <p:clrMapOvr>
+    <a:masterClrMapping/>
+  </p:clrMapOvr>
+</p:notes>
+</file>
+
+<file path=ppt/notesSlides/notesSlide9.xml><?xml version="1.0" encoding="utf-8"?>
+<p:notes xmlns:a="http://schemas.openxmlformats.org/drawingml/2006/main" xmlns:r="http://schemas.openxmlformats.org/officeDocument/2006/relationships" xmlns:p="http://schemas.openxmlformats.org/presentationml/2006/main">
+  <p:cSld>
+    <p:spTree>
+      <p:nvGrpSpPr>
+        <p:cNvPr id="1" name=""/>
+        <p:cNvGrpSpPr/>
+        <p:nvPr/>
+      </p:nvGrpSpPr>
+      <p:grpSpPr>
+        <a:xfrm>
+          <a:off x="0" y="0"/>
+          <a:ext cx="0" cy="0"/>
+          <a:chOff x="0" y="0"/>
+          <a:chExt cx="0" cy="0"/>
+        </a:xfrm>
+      </p:grpSpPr>
+      <p:sp>
+        <p:nvSpPr>
+          <p:cNvPr id="2" name="Slide Image Placeholder 1"/>
+          <p:cNvSpPr>
+            <a:spLocks noGrp="1" noRot="1" noChangeAspect="1"/>
+          </p:cNvSpPr>
+          <p:nvPr>
+            <p:ph type="sldImg"/>
+          </p:nvPr>
+        </p:nvSpPr>
+        <p:spPr/>
+      </p:sp>
+      <p:sp>
+        <p:nvSpPr>
+          <p:cNvPr id="3" name="Notes Placeholder 2"/>
+          <p:cNvSpPr>
+            <a:spLocks noGrp="1"/>
+          </p:cNvSpPr>
+          <p:nvPr>
+            <p:ph type="body" idx="1"/>
+          </p:nvPr>
+        </p:nvSpPr>
+        <p:spPr/>
+        <p:txBody>
+          <a:bodyPr/>
+          <a:lstStyle/>
+          <a:p>
+            <a:r>
+              <a:rPr lang="en-US" dirty="0"/>
+              <a:t/>
+            </a:r>
+            <a:endParaRPr lang="en-US" dirty="0"/>
+          </a:p>
+        </p:txBody>
+      </p:sp>
+      <p:sp>
+        <p:nvSpPr>
+          <p:cNvPr id="4" name="Slide Number Placeholder 3"/>
+          <p:cNvSpPr>
+            <a:spLocks noGrp="1"/>
+          </p:cNvSpPr>
+          <p:nvPr>
+            <p:ph type="sldNum" sz="quarter" idx="10"/>
+          </p:nvPr>
+        </p:nvSpPr>
+        <p:spPr/>
+        <p:txBody>
+          <a:bodyPr/>
+          <a:lstStyle/>
+          <a:p>
+            <a:fld id="{F7021451-1387-4CA6-816F-3879F97B5CBC}" type="slidenum">
+              <a:rPr lang="en-US"/>
+              <a:t>9</a:t>
             </a:fld>
             <a:endParaRPr lang="en-US"/>
           </a:p>
@@ -1556,7 +1734,7 @@
               <a:buAutoNum type="arabicPeriod" startAt="1"/>
             </a:pPr>
             <a:r>
-              <a:rPr lang="en-US" sz="1500" dirty="0">
+              <a:rPr lang="en-US" sz="1300" dirty="0">
                 <a:solidFill>
                   <a:srgbClr val="16130F"/>
                 </a:solidFill>
@@ -1566,7 +1744,7 @@
               </a:rPr>
               <a:t>Maharashtra's draft roll of 31 August 2026 left off 2.07 crore names, 21.1 of every 100 electors on the roll before the revision.</a:t>
             </a:r>
-            <a:endParaRPr lang="en-US" sz="1500" dirty="0"/>
+            <a:endParaRPr lang="en-US" sz="1300" dirty="0"/>
           </a:p>
           <a:p>
             <a:pPr marL="342900" indent="-342900">
@@ -1578,7 +1756,29 @@
               <a:buAutoNum type="arabicPeriod" startAt="1"/>
             </a:pPr>
             <a:r>
-              <a:rPr lang="en-US" sz="1500" dirty="0">
+              <a:rPr lang="en-US" sz="1300" dirty="0">
+                <a:solidFill>
+                  <a:srgbClr val="16130F"/>
+                </a:solidFill>
+                <a:latin typeface="Calibri" pitchFamily="34" charset="0"/>
+                <a:ea typeface="Calibri" pitchFamily="34" charset="-122"/>
+                <a:cs typeface="Calibri" pitchFamily="34" charset="-120"/>
+              </a:rPr>
+              <a:t>Bhiwandi East lost 49.1 of every 100 names, the most of the 288 constituencies, and in 220 of them more names were left off than the 2024 winning margin.</a:t>
+            </a:r>
+            <a:endParaRPr lang="en-US" sz="1300" dirty="0"/>
+          </a:p>
+          <a:p>
+            <a:pPr marL="342900" indent="-342900">
+              <a:spcAft>
+                <a:spcPts val="800"/>
+              </a:spcAft>
+              <a:buSzPct val="100000"/>
+              <a:buFont typeface="+mj-lt"/>
+              <a:buAutoNum type="arabicPeriod" startAt="1"/>
+            </a:pPr>
+            <a:r>
+              <a:rPr lang="en-US" sz="1300" dirty="0">
                 <a:solidFill>
                   <a:srgbClr val="16130F"/>
                 </a:solidFill>
@@ -1588,7 +1788,7 @@
               </a:rPr>
               <a:t>Thane left off 38.4 of every 100 electors, the most of the 36 districts, and Mumbai City, Mumbai Suburban, Pune and Nagpur come next. Hingoli left off the fewest, 8.8.</a:t>
             </a:r>
-            <a:endParaRPr lang="en-US" sz="1500" dirty="0"/>
+            <a:endParaRPr lang="en-US" sz="1300" dirty="0"/>
           </a:p>
           <a:p>
             <a:pPr marL="342900" indent="-342900">
@@ -1600,7 +1800,7 @@
               <a:buAutoNum type="arabicPeriod" startAt="1"/>
             </a:pPr>
             <a:r>
-              <a:rPr lang="en-US" sz="1500" dirty="0">
+              <a:rPr lang="en-US" sz="1300" dirty="0">
                 <a:solidFill>
                   <a:srgbClr val="16130F"/>
                 </a:solidFill>
@@ -1610,7 +1810,7 @@
               </a:rPr>
               <a:t>The five districts of Mumbai City, Mumbai Suburban, Thane, Palghar and Pune hold 29.9% of the state's roll and 48.4% of the names left off. They lost 34.2 of every 100 electors, against 15.6 in the other 31 districts.</a:t>
             </a:r>
-            <a:endParaRPr lang="en-US" sz="1500" dirty="0"/>
+            <a:endParaRPr lang="en-US" sz="1300" dirty="0"/>
           </a:p>
           <a:p>
             <a:pPr marL="342900" indent="-342900">
@@ -1622,7 +1822,7 @@
               <a:buAutoNum type="arabicPeriod" startAt="1"/>
             </a:pPr>
             <a:r>
-              <a:rPr lang="en-US" sz="1500" dirty="0">
+              <a:rPr lang="en-US" sz="1300" dirty="0">
                 <a:solidFill>
                   <a:srgbClr val="16130F"/>
                 </a:solidFill>
@@ -1630,9 +1830,9 @@
                 <a:ea typeface="Calibri" pitchFamily="34" charset="-122"/>
                 <a:cs typeface="Calibri" pitchFamily="34" charset="-120"/>
               </a:rPr>
-              <a:t>Pune lost the most names of any district, 28.7 lakh.</a:t>
-            </a:r>
-            <a:endParaRPr lang="en-US" sz="1500" dirty="0"/>
+              <a:t>37.1% of the names left off were entered as shifted for good, 36.5% as untraceable or absent, 16.8% as dead, 8.5% as enrolled at another place and 1.1% under another reason, by the Chief Electoral Officer's own tables.</a:t>
+            </a:r>
+            <a:endParaRPr lang="en-US" sz="1300" dirty="0"/>
           </a:p>
           <a:p>
             <a:pPr marL="342900" indent="-342900">
@@ -1644,7 +1844,7 @@
               <a:buAutoNum type="arabicPeriod" startAt="1"/>
             </a:pPr>
             <a:r>
-              <a:rPr lang="en-US" sz="1500" dirty="0">
+              <a:rPr lang="en-US" sz="1300" dirty="0">
                 <a:solidFill>
                   <a:srgbClr val="16130F"/>
                 </a:solidFill>
@@ -1654,7 +1854,7 @@
               </a:rPr>
               <a:t>Claims and objections run to 26 October 2026, and the final roll is due on 16 November 2026. Until it is out, nobody can say how many of the names left off will be put back.</a:t>
             </a:r>
-            <a:endParaRPr lang="en-US" sz="1500" dirty="0"/>
+            <a:endParaRPr lang="en-US" sz="1300" dirty="0"/>
           </a:p>
         </p:txBody>
       </p:sp>
@@ -1770,7 +1970,7 @@
       </p:sp>
       <p:pic>
         <p:nvPicPr>
-          <p:cNvPr id="4" name="Image 0" descr="/tmp/pack-8Tsy5x/mh-maharashtra-1.png">    </p:cNvPr>
+          <p:cNvPr id="4" name="Image 0" descr="/tmp/pack-YMIYSO/mh-maharashtra-1.png">    </p:cNvPr>
           <p:cNvPicPr>
             <a:picLocks noChangeAspect="1"/>
           </p:cNvPicPr>
@@ -1943,7 +2143,7 @@
       </p:sp>
       <p:pic>
         <p:nvPicPr>
-          <p:cNvPr id="4" name="Image 0" descr="/tmp/pack-8Tsy5x/mh-maharashtra-2.png">    </p:cNvPr>
+          <p:cNvPr id="4" name="Image 0" descr="/tmp/pack-YMIYSO/mh-maharashtra-2.png">    </p:cNvPr>
           <p:cNvPicPr>
             <a:picLocks noChangeAspect="1"/>
           </p:cNvPicPr>
@@ -2147,7 +2347,7 @@
                 <a:ea typeface="Cambria" pitchFamily="34" charset="-122"/>
                 <a:cs typeface="Cambria" pitchFamily="34" charset="-120"/>
               </a:rPr>
-              <a:t>According to the press, 74.7% of the names left off were entered as shifted, absent or other, 16.8% as dead and 8.5% as enrolled at more than one place.</a:t>
+              <a:t>37.1% of the names left off were entered as shifted for good and 36.5% as untraceable or absent, 73.6% together.</a:t>
             </a:r>
             <a:endParaRPr lang="en-US" sz="1900" dirty="0"/>
           </a:p>
@@ -2155,7 +2355,7 @@
       </p:sp>
       <p:pic>
         <p:nvPicPr>
-          <p:cNvPr id="4" name="Image 0" descr="/tmp/pack-8Tsy5x/mh-maharashtra-3.png">    </p:cNvPr>
+          <p:cNvPr id="4" name="Image 0" descr="/tmp/pack-YMIYSO/mh-maharashtra-3.png">    </p:cNvPr>
           <p:cNvPicPr>
             <a:picLocks noChangeAspect="1"/>
           </p:cNvPicPr>
@@ -2170,7 +2370,7 @@
         <p:spPr>
           <a:xfrm>
             <a:off x="548640" y="1691640"/>
-            <a:ext cx="11094415" cy="2460332"/>
+            <a:ext cx="11094415" cy="3346662"/>
           </a:xfrm>
           <a:prstGeom prst="rect">
             <a:avLst/>
@@ -2328,7 +2528,7 @@
       </p:sp>
       <p:pic>
         <p:nvPicPr>
-          <p:cNvPr id="4" name="Image 0" descr="/tmp/pack-8Tsy5x/mh-maharashtra-4.png">    </p:cNvPr>
+          <p:cNvPr id="4" name="Image 0" descr="/tmp/pack-YMIYSO/mh-maharashtra-4.png">    </p:cNvPr>
           <p:cNvPicPr>
             <a:picLocks noChangeAspect="1"/>
           </p:cNvPicPr>
@@ -2501,7 +2701,7 @@
       </p:sp>
       <p:pic>
         <p:nvPicPr>
-          <p:cNvPr id="4" name="Image 0" descr="/tmp/pack-8Tsy5x/mh-maharashtra-5.png">    </p:cNvPr>
+          <p:cNvPr id="4" name="Image 0" descr="/tmp/pack-YMIYSO/mh-maharashtra-5.png">    </p:cNvPr>
           <p:cNvPicPr>
             <a:picLocks noChangeAspect="1"/>
           </p:cNvPicPr>
@@ -2573,6 +2773,391 @@
 <file path=ppt/slides/slide7.xml><?xml version="1.0" encoding="utf-8"?>
 <p:sld xmlns:a="http://schemas.openxmlformats.org/drawingml/2006/main" xmlns:r="http://schemas.openxmlformats.org/officeDocument/2006/relationships" xmlns:p="http://schemas.openxmlformats.org/presentationml/2006/main">
   <p:cSld name="Slide 7">
+    <p:bg>
+      <p:bgPr>
+        <a:solidFill>
+          <a:srgbClr val="FFFFFF"/>
+        </a:solidFill>
+      </p:bgPr>
+    </p:bg>
+    <p:spTree>
+      <p:nvGrpSpPr>
+        <p:cNvPr id="1" name=""/>
+        <p:cNvGrpSpPr/>
+        <p:nvPr/>
+      </p:nvGrpSpPr>
+      <p:grpSpPr>
+        <a:xfrm>
+          <a:off x="0" y="0"/>
+          <a:ext cx="0" cy="0"/>
+          <a:chOff x="0" y="0"/>
+          <a:chExt cx="0" cy="0"/>
+        </a:xfrm>
+      </p:grpSpPr>
+      <p:sp>
+        <p:nvSpPr>
+          <p:cNvPr id="2" name="Text 0"/>
+          <p:cNvSpPr/>
+          <p:nvPr/>
+        </p:nvSpPr>
+        <p:spPr>
+          <a:xfrm>
+            <a:off x="548640" y="274320"/>
+            <a:ext cx="11094415" cy="274320"/>
+          </a:xfrm>
+          <a:prstGeom prst="rect">
+            <a:avLst/>
+          </a:prstGeom>
+          <a:noFill/>
+          <a:ln/>
+        </p:spPr>
+        <p:txBody>
+          <a:bodyPr wrap="square" rtlCol="0" anchor="ctr"/>
+          <a:lstStyle/>
+          <a:p>
+            <a:pPr indent="0" marL="0">
+              <a:buNone/>
+            </a:pPr>
+            <a:r>
+              <a:rPr lang="en-US" sz="1000" b="1" dirty="0">
+                <a:solidFill>
+                  <a:srgbClr val="B3261E"/>
+                </a:solidFill>
+                <a:latin typeface="Calibri" pitchFamily="34" charset="0"/>
+                <a:ea typeface="Calibri" pitchFamily="34" charset="-122"/>
+                <a:cs typeface="Calibri" pitchFamily="34" charset="-120"/>
+              </a:rPr>
+              <a:t>MAHARASHTRA 2026  ·  Notices</a:t>
+            </a:r>
+            <a:endParaRPr lang="en-US" sz="1000" dirty="0"/>
+          </a:p>
+        </p:txBody>
+      </p:sp>
+      <p:sp>
+        <p:nvSpPr>
+          <p:cNvPr id="3" name="Text 1"/>
+          <p:cNvSpPr/>
+          <p:nvPr/>
+        </p:nvSpPr>
+        <p:spPr>
+          <a:xfrm>
+            <a:off x="548640" y="548640"/>
+            <a:ext cx="11094415" cy="1051560"/>
+          </a:xfrm>
+          <a:prstGeom prst="rect">
+            <a:avLst/>
+          </a:prstGeom>
+          <a:noFill/>
+          <a:ln/>
+        </p:spPr>
+        <p:txBody>
+          <a:bodyPr wrap="square" rtlCol="0" anchor="t"/>
+          <a:lstStyle/>
+          <a:p>
+            <a:pPr indent="0" marL="0">
+              <a:buNone/>
+            </a:pPr>
+            <a:r>
+              <a:rPr lang="en-US" sz="2200" b="1" dirty="0">
+                <a:solidFill>
+                  <a:srgbClr val="16130F"/>
+                </a:solidFill>
+                <a:latin typeface="Cambria" pitchFamily="34" charset="0"/>
+                <a:ea typeface="Cambria" pitchFamily="34" charset="-122"/>
+                <a:cs typeface="Cambria" pitchFamily="34" charset="-120"/>
+              </a:rPr>
+              <a:t>1.22 crore electors still on the draft roll were in line for a notice, 15.8 of every 100.</a:t>
+            </a:r>
+            <a:endParaRPr lang="en-US" sz="2200" dirty="0"/>
+          </a:p>
+        </p:txBody>
+      </p:sp>
+      <p:pic>
+        <p:nvPicPr>
+          <p:cNvPr id="4" name="Image 0" descr="/tmp/pack-YMIYSO/mh-maharashtra-6.png">    </p:cNvPr>
+          <p:cNvPicPr>
+            <a:picLocks noChangeAspect="1"/>
+          </p:cNvPicPr>
+          <p:nvPr/>
+        </p:nvPicPr>
+        <p:blipFill>
+          <a:blip r:embed="rId1"/>
+          <a:stretch>
+            <a:fillRect/>
+          </a:stretch>
+        </p:blipFill>
+        <p:spPr>
+          <a:xfrm>
+            <a:off x="7577835" y="1691640"/>
+            <a:ext cx="4065220" cy="4709160"/>
+          </a:xfrm>
+          <a:prstGeom prst="rect">
+            <a:avLst/>
+          </a:prstGeom>
+        </p:spPr>
+      </p:pic>
+      <p:sp>
+        <p:nvSpPr>
+          <p:cNvPr id="5" name="Text 2"/>
+          <p:cNvSpPr/>
+          <p:nvPr/>
+        </p:nvSpPr>
+        <p:spPr>
+          <a:xfrm>
+            <a:off x="548640" y="1691640"/>
+            <a:ext cx="6663435" cy="4709160"/>
+          </a:xfrm>
+          <a:prstGeom prst="rect">
+            <a:avLst/>
+          </a:prstGeom>
+          <a:noFill/>
+          <a:ln/>
+        </p:spPr>
+        <p:txBody>
+          <a:bodyPr wrap="square" rtlCol="0" anchor="t"/>
+          <a:lstStyle/>
+          <a:p>
+            <a:pPr indent="0" marL="0">
+              <a:buNone/>
+            </a:pPr>
+            <a:r>
+              <a:rPr lang="en-US" sz="1300" dirty="0">
+                <a:solidFill>
+                  <a:srgbClr val="16130F"/>
+                </a:solidFill>
+                <a:latin typeface="Calibri" pitchFamily="34" charset="0"/>
+                <a:ea typeface="Calibri" pitchFamily="34" charset="-122"/>
+                <a:cs typeface="Calibri" pitchFamily="34" charset="-120"/>
+              </a:rPr>
+              <a:t>59.8 lakh could not be linked to the last intensive revision and 62.5 lakh had an anomaly in their entry. Mumbai Suburban had the most for its size, 31.7 of every 100 on its draft, and Parbhani the fewest, 1.6. Districts that left off more names also sent more notices (rank correlation 0.75). How many names have been struck off after a hearing has not been published. The counts are from the CEO's release of 4 September 2026.</a:t>
+            </a:r>
+            <a:endParaRPr lang="en-US" sz="1300" dirty="0"/>
+          </a:p>
+        </p:txBody>
+      </p:sp>
+      <p:sp>
+        <p:nvSpPr>
+          <p:cNvPr id="6" name="Text 3"/>
+          <p:cNvSpPr/>
+          <p:nvPr/>
+        </p:nvSpPr>
+        <p:spPr>
+          <a:xfrm>
+            <a:off x="548640" y="6446520"/>
+            <a:ext cx="11094415" cy="274320"/>
+          </a:xfrm>
+          <a:prstGeom prst="rect">
+            <a:avLst/>
+          </a:prstGeom>
+          <a:noFill/>
+          <a:ln/>
+        </p:spPr>
+        <p:txBody>
+          <a:bodyPr wrap="square" rtlCol="0" anchor="ctr"/>
+          <a:lstStyle/>
+          <a:p>
+            <a:pPr indent="0" marL="0">
+              <a:buNone/>
+            </a:pPr>
+            <a:r>
+              <a:rPr lang="en-US" sz="900" dirty="0">
+                <a:solidFill>
+                  <a:srgbClr val="5A534A"/>
+                </a:solidFill>
+                <a:latin typeface="Calibri" pitchFamily="34" charset="0"/>
+                <a:ea typeface="Calibri" pitchFamily="34" charset="-122"/>
+                <a:cs typeface="Calibri" pitchFamily="34" charset="-120"/>
+              </a:rPr>
+              <a:t>Figures as published by the Chief Electoral Officer or the Election Commission; the method section of the report gives each source.</a:t>
+            </a:r>
+            <a:endParaRPr lang="en-US" sz="900" dirty="0"/>
+          </a:p>
+        </p:txBody>
+      </p:sp>
+    </p:spTree>
+  </p:cSld>
+  <p:clrMapOvr>
+    <a:masterClrMapping/>
+  </p:clrMapOvr>
+</p:sld>
+</file>
+
+<file path=ppt/slides/slide8.xml><?xml version="1.0" encoding="utf-8"?>
+<p:sld xmlns:a="http://schemas.openxmlformats.org/drawingml/2006/main" xmlns:r="http://schemas.openxmlformats.org/officeDocument/2006/relationships" xmlns:p="http://schemas.openxmlformats.org/presentationml/2006/main">
+  <p:cSld name="Slide 8">
+    <p:bg>
+      <p:bgPr>
+        <a:solidFill>
+          <a:srgbClr val="FFFFFF"/>
+        </a:solidFill>
+      </p:bgPr>
+    </p:bg>
+    <p:spTree>
+      <p:nvGrpSpPr>
+        <p:cNvPr id="1" name=""/>
+        <p:cNvGrpSpPr/>
+        <p:nvPr/>
+      </p:nvGrpSpPr>
+      <p:grpSpPr>
+        <a:xfrm>
+          <a:off x="0" y="0"/>
+          <a:ext cx="0" cy="0"/>
+          <a:chOff x="0" y="0"/>
+          <a:chExt cx="0" cy="0"/>
+        </a:xfrm>
+      </p:grpSpPr>
+      <p:sp>
+        <p:nvSpPr>
+          <p:cNvPr id="2" name="Text 0"/>
+          <p:cNvSpPr/>
+          <p:nvPr/>
+        </p:nvSpPr>
+        <p:spPr>
+          <a:xfrm>
+            <a:off x="548640" y="274320"/>
+            <a:ext cx="11094415" cy="274320"/>
+          </a:xfrm>
+          <a:prstGeom prst="rect">
+            <a:avLst/>
+          </a:prstGeom>
+          <a:noFill/>
+          <a:ln/>
+        </p:spPr>
+        <p:txBody>
+          <a:bodyPr wrap="square" rtlCol="0" anchor="ctr"/>
+          <a:lstStyle/>
+          <a:p>
+            <a:pPr indent="0" marL="0">
+              <a:buNone/>
+            </a:pPr>
+            <a:r>
+              <a:rPr lang="en-US" sz="1000" b="1" dirty="0">
+                <a:solidFill>
+                  <a:srgbClr val="B3261E"/>
+                </a:solidFill>
+                <a:latin typeface="Calibri" pitchFamily="34" charset="0"/>
+                <a:ea typeface="Calibri" pitchFamily="34" charset="-122"/>
+                <a:cs typeface="Calibri" pitchFamily="34" charset="-120"/>
+              </a:rPr>
+              <a:t>MAHARASHTRA 2026  ·  Against the 2024 margins</a:t>
+            </a:r>
+            <a:endParaRPr lang="en-US" sz="1000" dirty="0"/>
+          </a:p>
+        </p:txBody>
+      </p:sp>
+      <p:sp>
+        <p:nvSpPr>
+          <p:cNvPr id="3" name="Text 1"/>
+          <p:cNvSpPr/>
+          <p:nvPr/>
+        </p:nvSpPr>
+        <p:spPr>
+          <a:xfrm>
+            <a:off x="548640" y="548640"/>
+            <a:ext cx="11094415" cy="1051560"/>
+          </a:xfrm>
+          <a:prstGeom prst="rect">
+            <a:avLst/>
+          </a:prstGeom>
+          <a:noFill/>
+          <a:ln/>
+        </p:spPr>
+        <p:txBody>
+          <a:bodyPr wrap="square" rtlCol="0" anchor="t"/>
+          <a:lstStyle/>
+          <a:p>
+            <a:pPr indent="0" marL="0">
+              <a:buNone/>
+            </a:pPr>
+            <a:r>
+              <a:rPr lang="en-US" sz="2200" b="1" dirty="0">
+                <a:solidFill>
+                  <a:srgbClr val="16130F"/>
+                </a:solidFill>
+                <a:latin typeface="Cambria" pitchFamily="34" charset="0"/>
+                <a:ea typeface="Cambria" pitchFamily="34" charset="-122"/>
+                <a:cs typeface="Cambria" pitchFamily="34" charset="-120"/>
+              </a:rPr>
+              <a:t>In 220 of the 288 constituencies more names were left off the draft than the 2024 winner's margin.</a:t>
+            </a:r>
+            <a:endParaRPr lang="en-US" sz="2200" dirty="0"/>
+          </a:p>
+        </p:txBody>
+      </p:sp>
+      <p:pic>
+        <p:nvPicPr>
+          <p:cNvPr id="4" name="Image 0" descr="/tmp/pack-YMIYSO/mh-maharashtra-7.png">    </p:cNvPr>
+          <p:cNvPicPr>
+            <a:picLocks noChangeAspect="1"/>
+          </p:cNvPicPr>
+          <p:nvPr/>
+        </p:nvPicPr>
+        <p:blipFill>
+          <a:blip r:embed="rId1"/>
+          <a:stretch>
+            <a:fillRect/>
+          </a:stretch>
+        </p:blipFill>
+        <p:spPr>
+          <a:xfrm>
+            <a:off x="2294867" y="1691640"/>
+            <a:ext cx="7601961" cy="4617720"/>
+          </a:xfrm>
+          <a:prstGeom prst="rect">
+            <a:avLst/>
+          </a:prstGeom>
+        </p:spPr>
+      </p:pic>
+      <p:sp>
+        <p:nvSpPr>
+          <p:cNvPr id="5" name="Text 2"/>
+          <p:cNvSpPr/>
+          <p:nvPr/>
+        </p:nvSpPr>
+        <p:spPr>
+          <a:xfrm>
+            <a:off x="548640" y="6446520"/>
+            <a:ext cx="11094415" cy="274320"/>
+          </a:xfrm>
+          <a:prstGeom prst="rect">
+            <a:avLst/>
+          </a:prstGeom>
+          <a:noFill/>
+          <a:ln/>
+        </p:spPr>
+        <p:txBody>
+          <a:bodyPr wrap="square" rtlCol="0" anchor="ctr"/>
+          <a:lstStyle/>
+          <a:p>
+            <a:pPr indent="0" marL="0">
+              <a:buNone/>
+            </a:pPr>
+            <a:r>
+              <a:rPr lang="en-US" sz="900" dirty="0">
+                <a:solidFill>
+                  <a:srgbClr val="5A534A"/>
+                </a:solidFill>
+                <a:latin typeface="Calibri" pitchFamily="34" charset="0"/>
+                <a:ea typeface="Calibri" pitchFamily="34" charset="-122"/>
+                <a:cs typeface="Calibri" pitchFamily="34" charset="-120"/>
+              </a:rPr>
+              <a:t>Figures as published by the Chief Electoral Officer or the Election Commission; the method section of the report gives each source.</a:t>
+            </a:r>
+            <a:endParaRPr lang="en-US" sz="900" dirty="0"/>
+          </a:p>
+        </p:txBody>
+      </p:sp>
+    </p:spTree>
+  </p:cSld>
+  <p:clrMapOvr>
+    <a:masterClrMapping/>
+  </p:clrMapOvr>
+</p:sld>
+</file>
+
+<file path=ppt/slides/slide9.xml><?xml version="1.0" encoding="utf-8"?>
+<p:sld xmlns:a="http://schemas.openxmlformats.org/drawingml/2006/main" xmlns:r="http://schemas.openxmlformats.org/officeDocument/2006/relationships" xmlns:p="http://schemas.openxmlformats.org/presentationml/2006/main">
+  <p:cSld name="Slide 9">
     <p:bg>
       <p:bgPr>
         <a:solidFill>
@@ -2709,7 +3294,7 @@
                 <a:ea typeface="Calibri" pitchFamily="34" charset="-122"/>
                 <a:cs typeface="Calibri" pitchFamily="34" charset="-120"/>
               </a:rPr>
-              <a:t>The Chief Electoral Officer published no count by reason or by sex, and constituency figures for only 38 seats it chose, so these pages show where names were left off and cannot show why.</a:t>
+              <a:t>The Chief Electoral Officer published no split of the names left off by sex, and a reason is what the officer wrote down, so these pages show where names were left off and what was entered, and cannot show why.</a:t>
             </a:r>
             <a:endParaRPr lang="en-US" sz="1500" dirty="0"/>
           </a:p>

--- a/reports/maharashtra-sir-2026-deck.pptx
+++ b/reports/maharashtra-sir-2026-deck.pptx
@@ -1970,7 +1970,7 @@
       </p:sp>
       <p:pic>
         <p:nvPicPr>
-          <p:cNvPr id="4" name="Image 0" descr="/tmp/pack-YMIYSO/mh-maharashtra-1.png">    </p:cNvPr>
+          <p:cNvPr id="4" name="Image 0" descr="/tmp/pack-7qNEwO/mh-maharashtra-1.png">    </p:cNvPr>
           <p:cNvPicPr>
             <a:picLocks noChangeAspect="1"/>
           </p:cNvPicPr>
@@ -2143,7 +2143,7 @@
       </p:sp>
       <p:pic>
         <p:nvPicPr>
-          <p:cNvPr id="4" name="Image 0" descr="/tmp/pack-YMIYSO/mh-maharashtra-2.png">    </p:cNvPr>
+          <p:cNvPr id="4" name="Image 0" descr="/tmp/pack-7qNEwO/mh-maharashtra-2.png">    </p:cNvPr>
           <p:cNvPicPr>
             <a:picLocks noChangeAspect="1"/>
           </p:cNvPicPr>
@@ -2355,7 +2355,7 @@
       </p:sp>
       <p:pic>
         <p:nvPicPr>
-          <p:cNvPr id="4" name="Image 0" descr="/tmp/pack-YMIYSO/mh-maharashtra-3.png">    </p:cNvPr>
+          <p:cNvPr id="4" name="Image 0" descr="/tmp/pack-7qNEwO/mh-maharashtra-3.png">    </p:cNvPr>
           <p:cNvPicPr>
             <a:picLocks noChangeAspect="1"/>
           </p:cNvPicPr>
@@ -2528,7 +2528,7 @@
       </p:sp>
       <p:pic>
         <p:nvPicPr>
-          <p:cNvPr id="4" name="Image 0" descr="/tmp/pack-YMIYSO/mh-maharashtra-4.png">    </p:cNvPr>
+          <p:cNvPr id="4" name="Image 0" descr="/tmp/pack-7qNEwO/mh-maharashtra-4.png">    </p:cNvPr>
           <p:cNvPicPr>
             <a:picLocks noChangeAspect="1"/>
           </p:cNvPicPr>
@@ -2701,7 +2701,7 @@
       </p:sp>
       <p:pic>
         <p:nvPicPr>
-          <p:cNvPr id="4" name="Image 0" descr="/tmp/pack-YMIYSO/mh-maharashtra-5.png">    </p:cNvPr>
+          <p:cNvPr id="4" name="Image 0" descr="/tmp/pack-7qNEwO/mh-maharashtra-5.png">    </p:cNvPr>
           <p:cNvPicPr>
             <a:picLocks noChangeAspect="1"/>
           </p:cNvPicPr>
@@ -2874,7 +2874,7 @@
       </p:sp>
       <p:pic>
         <p:nvPicPr>
-          <p:cNvPr id="4" name="Image 0" descr="/tmp/pack-YMIYSO/mh-maharashtra-6.png">    </p:cNvPr>
+          <p:cNvPr id="4" name="Image 0" descr="/tmp/pack-7qNEwO/mh-maharashtra-6.png">    </p:cNvPr>
           <p:cNvPicPr>
             <a:picLocks noChangeAspect="1"/>
           </p:cNvPicPr>
@@ -3086,7 +3086,7 @@
       </p:sp>
       <p:pic>
         <p:nvPicPr>
-          <p:cNvPr id="4" name="Image 0" descr="/tmp/pack-YMIYSO/mh-maharashtra-7.png">    </p:cNvPr>
+          <p:cNvPr id="4" name="Image 0" descr="/tmp/pack-7qNEwO/mh-maharashtra-7.png">    </p:cNvPr>
           <p:cNvPicPr>
             <a:picLocks noChangeAspect="1"/>
           </p:cNvPicPr>

--- a/reports/maharashtra-sir-2026-deck.pptx
+++ b/reports/maharashtra-sir-2026-deck.pptx
@@ -1038,7 +1038,7 @@
           <a:p>
             <a:r>
               <a:rPr lang="en-US" dirty="0"/>
-              <a:t>1.22 crore electors still on the draft roll were in line for a notice, 15.8 of every 100. 59.8 lakh could not be linked to the last intensive revision and 62.5 lakh had an anomaly in their entry. Mumbai Suburban had the most for its size, 31.7 of every 100 on its draft, and Parbhani the fewest, 1.6. Districts that left off more names also sent more notices (rank correlation 0.75). How many names have been struck off after a hearing has not been published. The counts are from the CEO's release of 4 September 2026.</a:t>
+              <a:t>1.22 crore electors still on the draft roll were in line for a notice, 15.8 of every 100. 59.8 lakh could not be linked to the last intensive revision and 62.5 lakh had an anomaly in their entry. Mumbai Suburban had the most for its size, 31.7 of every 100 on its draft, and Parbhani the fewest, 1.6. Districts that left off more names also sent more notices (rank correlation 0.75). How many names have been deleted after a hearing has not been published. The counts are from the CEO's release of 4 September 2026.</a:t>
             </a:r>
             <a:endParaRPr lang="en-US" dirty="0"/>
           </a:p>
@@ -1970,7 +1970,7 @@
       </p:sp>
       <p:pic>
         <p:nvPicPr>
-          <p:cNvPr id="4" name="Image 0" descr="/tmp/pack-7qNEwO/mh-maharashtra-1.png">    </p:cNvPr>
+          <p:cNvPr id="4" name="Image 0" descr="/tmp/pack-BpyxFC/mh-maharashtra-1.png">    </p:cNvPr>
           <p:cNvPicPr>
             <a:picLocks noChangeAspect="1"/>
           </p:cNvPicPr>
@@ -2143,7 +2143,7 @@
       </p:sp>
       <p:pic>
         <p:nvPicPr>
-          <p:cNvPr id="4" name="Image 0" descr="/tmp/pack-7qNEwO/mh-maharashtra-2.png">    </p:cNvPr>
+          <p:cNvPr id="4" name="Image 0" descr="/tmp/pack-BpyxFC/mh-maharashtra-2.png">    </p:cNvPr>
           <p:cNvPicPr>
             <a:picLocks noChangeAspect="1"/>
           </p:cNvPicPr>
@@ -2355,7 +2355,7 @@
       </p:sp>
       <p:pic>
         <p:nvPicPr>
-          <p:cNvPr id="4" name="Image 0" descr="/tmp/pack-7qNEwO/mh-maharashtra-3.png">    </p:cNvPr>
+          <p:cNvPr id="4" name="Image 0" descr="/tmp/pack-BpyxFC/mh-maharashtra-3.png">    </p:cNvPr>
           <p:cNvPicPr>
             <a:picLocks noChangeAspect="1"/>
           </p:cNvPicPr>
@@ -2528,7 +2528,7 @@
       </p:sp>
       <p:pic>
         <p:nvPicPr>
-          <p:cNvPr id="4" name="Image 0" descr="/tmp/pack-7qNEwO/mh-maharashtra-4.png">    </p:cNvPr>
+          <p:cNvPr id="4" name="Image 0" descr="/tmp/pack-BpyxFC/mh-maharashtra-4.png">    </p:cNvPr>
           <p:cNvPicPr>
             <a:picLocks noChangeAspect="1"/>
           </p:cNvPicPr>
@@ -2701,7 +2701,7 @@
       </p:sp>
       <p:pic>
         <p:nvPicPr>
-          <p:cNvPr id="4" name="Image 0" descr="/tmp/pack-7qNEwO/mh-maharashtra-5.png">    </p:cNvPr>
+          <p:cNvPr id="4" name="Image 0" descr="/tmp/pack-BpyxFC/mh-maharashtra-5.png">    </p:cNvPr>
           <p:cNvPicPr>
             <a:picLocks noChangeAspect="1"/>
           </p:cNvPicPr>
@@ -2874,7 +2874,7 @@
       </p:sp>
       <p:pic>
         <p:nvPicPr>
-          <p:cNvPr id="4" name="Image 0" descr="/tmp/pack-7qNEwO/mh-maharashtra-6.png">    </p:cNvPr>
+          <p:cNvPr id="4" name="Image 0" descr="/tmp/pack-BpyxFC/mh-maharashtra-6.png">    </p:cNvPr>
           <p:cNvPicPr>
             <a:picLocks noChangeAspect="1"/>
           </p:cNvPicPr>
@@ -2929,7 +2929,7 @@
                 <a:ea typeface="Calibri" pitchFamily="34" charset="-122"/>
                 <a:cs typeface="Calibri" pitchFamily="34" charset="-120"/>
               </a:rPr>
-              <a:t>59.8 lakh could not be linked to the last intensive revision and 62.5 lakh had an anomaly in their entry. Mumbai Suburban had the most for its size, 31.7 of every 100 on its draft, and Parbhani the fewest, 1.6. Districts that left off more names also sent more notices (rank correlation 0.75). How many names have been struck off after a hearing has not been published. The counts are from the CEO's release of 4 September 2026.</a:t>
+              <a:t>59.8 lakh could not be linked to the last intensive revision and 62.5 lakh had an anomaly in their entry. Mumbai Suburban had the most for its size, 31.7 of every 100 on its draft, and Parbhani the fewest, 1.6. Districts that left off more names also sent more notices (rank correlation 0.75). How many names have been deleted after a hearing has not been published. The counts are from the CEO's release of 4 September 2026.</a:t>
             </a:r>
             <a:endParaRPr lang="en-US" sz="1300" dirty="0"/>
           </a:p>
@@ -3086,7 +3086,7 @@
       </p:sp>
       <p:pic>
         <p:nvPicPr>
-          <p:cNvPr id="4" name="Image 0" descr="/tmp/pack-7qNEwO/mh-maharashtra-7.png">    </p:cNvPr>
+          <p:cNvPr id="4" name="Image 0" descr="/tmp/pack-BpyxFC/mh-maharashtra-7.png">    </p:cNvPr>
           <p:cNvPicPr>
             <a:picLocks noChangeAspect="1"/>
           </p:cNvPicPr>
